--- a/PPT정리/27. 서브 에이전트로 PRD 생성.pptx
+++ b/PPT정리/27. 서브 에이전트로 PRD 생성.pptx
@@ -8,6 +8,9 @@
     <p:sldId id="256" r:id="rId2"/>
     <p:sldId id="257" r:id="rId3"/>
     <p:sldId id="258" r:id="rId4"/>
+    <p:sldId id="259" r:id="rId5"/>
+    <p:sldId id="260" r:id="rId6"/>
+    <p:sldId id="261" r:id="rId7"/>
   </p:sldIdLst>
   <p:sldSz cx="12192000" cy="6858000"/>
   <p:notesSz cx="6858000" cy="9144000"/>
@@ -106,6 +109,29 @@
       </a:defRPr>
     </a:lvl9pPr>
   </p:defaultTextStyle>
+  <p:extLst>
+    <p:ext uri="{521415D9-36F7-43E2-AB2F-B90AF26B5E84}">
+      <p14:sectionLst xmlns:p14="http://schemas.microsoft.com/office/powerpoint/2010/main">
+        <p14:section name="기본 구역" id="{8747F863-2F97-453B-9418-3778BE86664E}">
+          <p14:sldIdLst>
+            <p14:sldId id="256"/>
+            <p14:sldId id="257"/>
+            <p14:sldId id="258"/>
+            <p14:sldId id="259"/>
+            <p14:sldId id="260"/>
+          </p14:sldIdLst>
+        </p14:section>
+        <p14:section name="핵심 Work Flow" id="{E293CCF3-1530-448B-80C5-E8FB86FB5399}">
+          <p14:sldIdLst>
+            <p14:sldId id="261"/>
+          </p14:sldIdLst>
+        </p14:section>
+      </p14:sectionLst>
+    </p:ext>
+    <p:ext uri="{EFAFB233-063F-42B5-8137-9DF3F51BA10A}">
+      <p15:sldGuideLst xmlns:p15="http://schemas.microsoft.com/office/powerpoint/2012/main"/>
+    </p:ext>
+  </p:extLst>
 </p:presentation>
 </file>
 
@@ -4507,10 +4533,9 @@
               <a:t>Agent </a:t>
             </a:r>
             <a:r>
-              <a:rPr lang="ko-KR" altLang="en-US" sz="1200"/>
+              <a:rPr lang="ko-KR" altLang="en-US" sz="1200" dirty="0"/>
               <a:t>생성</a:t>
             </a:r>
-            <a:endParaRPr lang="ko-KR" altLang="en-US" sz="1200" dirty="0"/>
           </a:p>
         </p:txBody>
       </p:sp>
@@ -4518,6 +4543,893 @@
     <p:extLst>
       <p:ext uri="{BB962C8B-B14F-4D97-AF65-F5344CB8AC3E}">
         <p14:creationId xmlns:p14="http://schemas.microsoft.com/office/powerpoint/2010/main" val="638979342"/>
+      </p:ext>
+    </p:extLst>
+  </p:cSld>
+  <p:clrMapOvr>
+    <a:masterClrMapping/>
+  </p:clrMapOvr>
+</p:sld>
+</file>
+
+<file path=ppt/slides/slide4.xml><?xml version="1.0" encoding="utf-8"?>
+<p:sld xmlns:a="http://schemas.openxmlformats.org/drawingml/2006/main" xmlns:r="http://schemas.openxmlformats.org/officeDocument/2006/relationships" xmlns:p="http://schemas.openxmlformats.org/presentationml/2006/main">
+  <p:cSld>
+    <p:spTree>
+      <p:nvGrpSpPr>
+        <p:cNvPr id="1" name=""/>
+        <p:cNvGrpSpPr/>
+        <p:nvPr/>
+      </p:nvGrpSpPr>
+      <p:grpSpPr>
+        <a:xfrm>
+          <a:off x="0" y="0"/>
+          <a:ext cx="0" cy="0"/>
+          <a:chOff x="0" y="0"/>
+          <a:chExt cx="0" cy="0"/>
+        </a:xfrm>
+      </p:grpSpPr>
+      <p:sp>
+        <p:nvSpPr>
+          <p:cNvPr id="2" name="제목 1">
+            <a:extLst>
+              <a:ext uri="{FF2B5EF4-FFF2-40B4-BE49-F238E27FC236}">
+                <a16:creationId xmlns:a16="http://schemas.microsoft.com/office/drawing/2014/main" id="{5B382732-7273-112E-BDB8-DA34888FE1AB}"/>
+              </a:ext>
+            </a:extLst>
+          </p:cNvPr>
+          <p:cNvSpPr>
+            <a:spLocks noGrp="1"/>
+          </p:cNvSpPr>
+          <p:nvPr>
+            <p:ph type="title"/>
+          </p:nvPr>
+        </p:nvSpPr>
+        <p:spPr/>
+        <p:txBody>
+          <a:bodyPr>
+            <a:normAutofit/>
+          </a:bodyPr>
+          <a:lstStyle/>
+          <a:p>
+            <a:r>
+              <a:rPr lang="ko-KR" altLang="en-US" sz="3200" dirty="0" err="1"/>
+              <a:t>노션</a:t>
+            </a:r>
+            <a:r>
+              <a:rPr lang="ko-KR" altLang="en-US" sz="3200" dirty="0"/>
+              <a:t> 전문가 서브 에이전트에게 </a:t>
+            </a:r>
+            <a:r>
+              <a:rPr lang="ko-KR" altLang="en-US" sz="3200" dirty="0" err="1"/>
+              <a:t>노션</a:t>
+            </a:r>
+            <a:r>
+              <a:rPr lang="ko-KR" altLang="en-US" sz="3200" dirty="0"/>
+              <a:t> </a:t>
+            </a:r>
+            <a:r>
+              <a:rPr lang="en-US" altLang="ko-KR" sz="3200" dirty="0"/>
+              <a:t>DB</a:t>
+            </a:r>
+            <a:r>
+              <a:rPr lang="ko-KR" altLang="en-US" sz="3200" dirty="0"/>
+              <a:t>사용법 분석 요구</a:t>
+            </a:r>
+          </a:p>
+        </p:txBody>
+      </p:sp>
+      <p:pic>
+        <p:nvPicPr>
+          <p:cNvPr id="4" name="그림 3">
+            <a:extLst>
+              <a:ext uri="{FF2B5EF4-FFF2-40B4-BE49-F238E27FC236}">
+                <a16:creationId xmlns:a16="http://schemas.microsoft.com/office/drawing/2014/main" id="{AB24A601-8319-86D3-F106-490ED8C1A7B5}"/>
+              </a:ext>
+            </a:extLst>
+          </p:cNvPr>
+          <p:cNvPicPr>
+            <a:picLocks noChangeAspect="1"/>
+          </p:cNvPicPr>
+          <p:nvPr/>
+        </p:nvPicPr>
+        <p:blipFill>
+          <a:blip r:embed="rId2"/>
+          <a:stretch>
+            <a:fillRect/>
+          </a:stretch>
+        </p:blipFill>
+        <p:spPr>
+          <a:xfrm>
+            <a:off x="1097280" y="2014467"/>
+            <a:ext cx="8811855" cy="1000265"/>
+          </a:xfrm>
+          <a:prstGeom prst="rect">
+            <a:avLst/>
+          </a:prstGeom>
+        </p:spPr>
+      </p:pic>
+    </p:spTree>
+    <p:extLst>
+      <p:ext uri="{BB962C8B-B14F-4D97-AF65-F5344CB8AC3E}">
+        <p14:creationId xmlns:p14="http://schemas.microsoft.com/office/powerpoint/2010/main" val="2810118522"/>
+      </p:ext>
+    </p:extLst>
+  </p:cSld>
+  <p:clrMapOvr>
+    <a:masterClrMapping/>
+  </p:clrMapOvr>
+</p:sld>
+</file>
+
+<file path=ppt/slides/slide5.xml><?xml version="1.0" encoding="utf-8"?>
+<p:sld xmlns:a="http://schemas.openxmlformats.org/drawingml/2006/main" xmlns:r="http://schemas.openxmlformats.org/officeDocument/2006/relationships" xmlns:p="http://schemas.openxmlformats.org/presentationml/2006/main">
+  <p:cSld>
+    <p:spTree>
+      <p:nvGrpSpPr>
+        <p:cNvPr id="1" name=""/>
+        <p:cNvGrpSpPr/>
+        <p:nvPr/>
+      </p:nvGrpSpPr>
+      <p:grpSpPr>
+        <a:xfrm>
+          <a:off x="0" y="0"/>
+          <a:ext cx="0" cy="0"/>
+          <a:chOff x="0" y="0"/>
+          <a:chExt cx="0" cy="0"/>
+        </a:xfrm>
+      </p:grpSpPr>
+      <p:sp>
+        <p:nvSpPr>
+          <p:cNvPr id="2" name="제목 1">
+            <a:extLst>
+              <a:ext uri="{FF2B5EF4-FFF2-40B4-BE49-F238E27FC236}">
+                <a16:creationId xmlns:a16="http://schemas.microsoft.com/office/drawing/2014/main" id="{F0D86383-8E37-C447-248C-A5D561C8739F}"/>
+              </a:ext>
+            </a:extLst>
+          </p:cNvPr>
+          <p:cNvSpPr>
+            <a:spLocks noGrp="1"/>
+          </p:cNvSpPr>
+          <p:nvPr>
+            <p:ph type="title"/>
+          </p:nvPr>
+        </p:nvSpPr>
+        <p:spPr/>
+        <p:txBody>
+          <a:bodyPr>
+            <a:normAutofit/>
+          </a:bodyPr>
+          <a:lstStyle/>
+          <a:p>
+            <a:r>
+              <a:rPr lang="en-US" altLang="ko-KR" sz="4400" dirty="0" err="1"/>
+              <a:t>prd</a:t>
+            </a:r>
+            <a:r>
+              <a:rPr lang="en-US" altLang="ko-KR" sz="4400" dirty="0"/>
+              <a:t>-generator </a:t>
+            </a:r>
+            <a:r>
+              <a:rPr lang="ko-KR" altLang="en-US" sz="4400" dirty="0"/>
+              <a:t>에이전트로 </a:t>
+            </a:r>
+            <a:r>
+              <a:rPr lang="en-US" altLang="ko-KR" sz="4400" dirty="0"/>
+              <a:t>PRD </a:t>
+            </a:r>
+            <a:r>
+              <a:rPr lang="ko-KR" altLang="en-US" sz="4400" dirty="0"/>
+              <a:t>작성 요청</a:t>
+            </a:r>
+          </a:p>
+        </p:txBody>
+      </p:sp>
+      <p:pic>
+        <p:nvPicPr>
+          <p:cNvPr id="4" name="그림 3">
+            <a:extLst>
+              <a:ext uri="{FF2B5EF4-FFF2-40B4-BE49-F238E27FC236}">
+                <a16:creationId xmlns:a16="http://schemas.microsoft.com/office/drawing/2014/main" id="{26795556-E13B-D9C7-90D1-07D2E13614D2}"/>
+              </a:ext>
+            </a:extLst>
+          </p:cNvPr>
+          <p:cNvPicPr>
+            <a:picLocks noChangeAspect="1"/>
+          </p:cNvPicPr>
+          <p:nvPr/>
+        </p:nvPicPr>
+        <p:blipFill>
+          <a:blip r:embed="rId2"/>
+          <a:stretch>
+            <a:fillRect/>
+          </a:stretch>
+        </p:blipFill>
+        <p:spPr>
+          <a:xfrm>
+            <a:off x="1097280" y="1737360"/>
+            <a:ext cx="8911472" cy="5012703"/>
+          </a:xfrm>
+          <a:prstGeom prst="rect">
+            <a:avLst/>
+          </a:prstGeom>
+        </p:spPr>
+      </p:pic>
+    </p:spTree>
+    <p:extLst>
+      <p:ext uri="{BB962C8B-B14F-4D97-AF65-F5344CB8AC3E}">
+        <p14:creationId xmlns:p14="http://schemas.microsoft.com/office/powerpoint/2010/main" val="1924895766"/>
+      </p:ext>
+    </p:extLst>
+  </p:cSld>
+  <p:clrMapOvr>
+    <a:masterClrMapping/>
+  </p:clrMapOvr>
+</p:sld>
+</file>
+
+<file path=ppt/slides/slide6.xml><?xml version="1.0" encoding="utf-8"?>
+<p:sld xmlns:a="http://schemas.openxmlformats.org/drawingml/2006/main" xmlns:r="http://schemas.openxmlformats.org/officeDocument/2006/relationships" xmlns:p="http://schemas.openxmlformats.org/presentationml/2006/main">
+  <p:cSld>
+    <p:spTree>
+      <p:nvGrpSpPr>
+        <p:cNvPr id="1" name=""/>
+        <p:cNvGrpSpPr/>
+        <p:nvPr/>
+      </p:nvGrpSpPr>
+      <p:grpSpPr>
+        <a:xfrm>
+          <a:off x="0" y="0"/>
+          <a:ext cx="0" cy="0"/>
+          <a:chOff x="0" y="0"/>
+          <a:chExt cx="0" cy="0"/>
+        </a:xfrm>
+      </p:grpSpPr>
+      <p:sp>
+        <p:nvSpPr>
+          <p:cNvPr id="2" name="제목 1">
+            <a:extLst>
+              <a:ext uri="{FF2B5EF4-FFF2-40B4-BE49-F238E27FC236}">
+                <a16:creationId xmlns:a16="http://schemas.microsoft.com/office/drawing/2014/main" id="{C365F22A-2E60-AA0C-D785-65BC115F0061}"/>
+              </a:ext>
+            </a:extLst>
+          </p:cNvPr>
+          <p:cNvSpPr>
+            <a:spLocks noGrp="1"/>
+          </p:cNvSpPr>
+          <p:nvPr>
+            <p:ph type="title"/>
+          </p:nvPr>
+        </p:nvSpPr>
+        <p:spPr/>
+        <p:txBody>
+          <a:bodyPr/>
+          <a:lstStyle/>
+          <a:p>
+            <a:r>
+              <a:rPr lang="en-US" altLang="ko-KR" dirty="0"/>
+              <a:t>PRD</a:t>
+            </a:r>
+            <a:r>
+              <a:rPr lang="ko-KR" altLang="en-US" dirty="0"/>
+              <a:t> 생성 </a:t>
+            </a:r>
+            <a:r>
+              <a:rPr lang="en-US" altLang="ko-KR" dirty="0"/>
+              <a:t>Work Flow </a:t>
+            </a:r>
+            <a:r>
+              <a:rPr lang="ko-KR" altLang="en-US" dirty="0"/>
+              <a:t>정리</a:t>
+            </a:r>
+            <a:r>
+              <a:rPr lang="en-US" altLang="ko-KR" dirty="0"/>
+              <a:t>.</a:t>
+            </a:r>
+            <a:endParaRPr lang="ko-KR" altLang="en-US" dirty="0"/>
+          </a:p>
+        </p:txBody>
+      </p:sp>
+      <p:sp>
+        <p:nvSpPr>
+          <p:cNvPr id="3" name="TextBox 2">
+            <a:extLst>
+              <a:ext uri="{FF2B5EF4-FFF2-40B4-BE49-F238E27FC236}">
+                <a16:creationId xmlns:a16="http://schemas.microsoft.com/office/drawing/2014/main" id="{89F033F6-1FD6-DEFD-BB67-9550B5A86527}"/>
+              </a:ext>
+            </a:extLst>
+          </p:cNvPr>
+          <p:cNvSpPr txBox="1"/>
+          <p:nvPr/>
+        </p:nvSpPr>
+        <p:spPr>
+          <a:xfrm>
+            <a:off x="1225485" y="1894788"/>
+            <a:ext cx="10058400" cy="4370427"/>
+          </a:xfrm>
+          <a:prstGeom prst="rect">
+            <a:avLst/>
+          </a:prstGeom>
+          <a:noFill/>
+        </p:spPr>
+        <p:txBody>
+          <a:bodyPr wrap="square" rtlCol="0">
+            <a:spAutoFit/>
+          </a:bodyPr>
+          <a:lstStyle/>
+          <a:p>
+            <a:pPr marL="228600" indent="-228600">
+              <a:buAutoNum type="arabicPeriod"/>
+            </a:pPr>
+            <a:r>
+              <a:rPr lang="en-US" altLang="ko-KR" sz="1200" b="1" dirty="0">
+                <a:solidFill>
+                  <a:srgbClr val="FF0000"/>
+                </a:solidFill>
+              </a:rPr>
+              <a:t>PRD</a:t>
+            </a:r>
+            <a:r>
+              <a:rPr lang="ko-KR" altLang="en-US" sz="1200" b="1" dirty="0">
+                <a:solidFill>
+                  <a:srgbClr val="FF0000"/>
+                </a:solidFill>
+              </a:rPr>
+              <a:t> 전문으로 생성하는 </a:t>
+            </a:r>
+            <a:r>
+              <a:rPr lang="en-US" altLang="ko-KR" sz="1200" b="1" dirty="0">
+                <a:solidFill>
+                  <a:srgbClr val="FF0000"/>
+                </a:solidFill>
+              </a:rPr>
+              <a:t>Sub Agent</a:t>
+            </a:r>
+            <a:r>
+              <a:rPr lang="ko-KR" altLang="en-US" sz="1200" b="1" dirty="0">
+                <a:solidFill>
+                  <a:srgbClr val="FF0000"/>
+                </a:solidFill>
+              </a:rPr>
+              <a:t> 역할 부여</a:t>
+            </a:r>
+            <a:r>
+              <a:rPr lang="en-US" altLang="ko-KR" sz="1200" b="1" dirty="0">
+                <a:solidFill>
+                  <a:srgbClr val="FF0000"/>
+                </a:solidFill>
+              </a:rPr>
+              <a:t>.</a:t>
+            </a:r>
+            <a:br>
+              <a:rPr lang="en-US" altLang="ko-KR" sz="1200" dirty="0"/>
+            </a:br>
+            <a:r>
+              <a:rPr lang="en-US" altLang="ko-KR" sz="1200" dirty="0"/>
+              <a:t>    - </a:t>
+            </a:r>
+            <a:r>
+              <a:rPr lang="ko-KR" altLang="en-US" sz="1100" dirty="0"/>
+              <a:t>당신은 </a:t>
+            </a:r>
+            <a:r>
+              <a:rPr lang="en-US" altLang="ko-KR" sz="1100" dirty="0"/>
+              <a:t>1</a:t>
+            </a:r>
+            <a:r>
+              <a:rPr lang="ko-KR" altLang="en-US" sz="1100" dirty="0"/>
+              <a:t>인 개발자를 위한 </a:t>
+            </a:r>
+            <a:r>
+              <a:rPr lang="en-US" altLang="ko-KR" sz="1100" dirty="0"/>
+              <a:t>PRD(Product Requirements Document) </a:t>
+            </a:r>
+            <a:r>
+              <a:rPr lang="ko-KR" altLang="en-US" sz="1100" dirty="0"/>
+              <a:t>생성 전문가입니다</a:t>
+            </a:r>
+            <a:r>
+              <a:rPr lang="en-US" altLang="ko-KR" sz="1100" dirty="0"/>
+              <a:t>.</a:t>
+            </a:r>
+            <a:br>
+              <a:rPr lang="en-US" altLang="ko-KR" sz="1100" dirty="0"/>
+            </a:br>
+            <a:r>
+              <a:rPr lang="en-US" altLang="ko-KR" sz="1100" dirty="0"/>
+              <a:t>       </a:t>
+            </a:r>
+            <a:r>
+              <a:rPr lang="ko-KR" altLang="en-US" sz="1100" dirty="0"/>
+              <a:t>기업용 </a:t>
+            </a:r>
+            <a:r>
+              <a:rPr lang="en-US" altLang="ko-KR" sz="1100" dirty="0"/>
+              <a:t>PRD</a:t>
+            </a:r>
+            <a:r>
+              <a:rPr lang="ko-KR" altLang="en-US" sz="1100" dirty="0"/>
+              <a:t>의 복잡함을 배제하고</a:t>
+            </a:r>
+            <a:r>
+              <a:rPr lang="en-US" altLang="ko-KR" sz="1100" dirty="0"/>
+              <a:t>, </a:t>
+            </a:r>
+            <a:r>
+              <a:rPr lang="ko-KR" altLang="en-US" sz="1100" dirty="0"/>
+              <a:t>바로 개발 가능한 실용적 명세만 생성합니다</a:t>
+            </a:r>
+            <a:r>
+              <a:rPr lang="en-US" altLang="ko-KR" sz="1100" dirty="0"/>
+              <a:t>.</a:t>
+            </a:r>
+          </a:p>
+          <a:p>
+            <a:pPr marL="228600" indent="-228600">
+              <a:buAutoNum type="arabicPeriod"/>
+            </a:pPr>
+            <a:endParaRPr lang="en-US" altLang="ko-KR" sz="1100" b="1" dirty="0"/>
+          </a:p>
+          <a:p>
+            <a:pPr marL="228600" indent="-228600">
+              <a:buAutoNum type="arabicPeriod"/>
+            </a:pPr>
+            <a:r>
+              <a:rPr lang="ko-KR" altLang="en-US" sz="1100" b="1" dirty="0">
+                <a:solidFill>
+                  <a:srgbClr val="FF0000"/>
+                </a:solidFill>
+              </a:rPr>
+              <a:t>생성한 </a:t>
+            </a:r>
+            <a:r>
+              <a:rPr lang="ko-KR" altLang="en-US" sz="1100" b="1" dirty="0" err="1">
+                <a:solidFill>
+                  <a:srgbClr val="FF0000"/>
+                </a:solidFill>
+              </a:rPr>
+              <a:t>서브에이전트를</a:t>
+            </a:r>
+            <a:r>
+              <a:rPr lang="ko-KR" altLang="en-US" sz="1100" b="1" dirty="0">
+                <a:solidFill>
+                  <a:srgbClr val="FF0000"/>
+                </a:solidFill>
+              </a:rPr>
+              <a:t> 이용하여</a:t>
+            </a:r>
+            <a:r>
+              <a:rPr lang="en-US" altLang="ko-KR" sz="1100" b="1" dirty="0">
+                <a:solidFill>
+                  <a:srgbClr val="FF0000"/>
+                </a:solidFill>
+              </a:rPr>
+              <a:t>, PRD </a:t>
+            </a:r>
+            <a:r>
+              <a:rPr lang="ko-KR" altLang="en-US" sz="1100" b="1" dirty="0">
+                <a:solidFill>
+                  <a:srgbClr val="FF0000"/>
+                </a:solidFill>
+              </a:rPr>
+              <a:t>생성 요청</a:t>
+            </a:r>
+            <a:r>
+              <a:rPr lang="en-US" altLang="ko-KR" sz="1100" b="1" dirty="0">
+                <a:solidFill>
+                  <a:srgbClr val="FF0000"/>
+                </a:solidFill>
+              </a:rPr>
+              <a:t>.</a:t>
+            </a:r>
+          </a:p>
+          <a:p>
+            <a:pPr marL="228600" indent="-228600">
+              <a:buAutoNum type="arabicPeriod"/>
+            </a:pPr>
+            <a:endParaRPr lang="en-US" altLang="ko-KR" sz="1100" b="1" dirty="0"/>
+          </a:p>
+          <a:p>
+            <a:pPr marL="228600" indent="-228600">
+              <a:buAutoNum type="arabicPeriod"/>
+            </a:pPr>
+            <a:r>
+              <a:rPr lang="ko-KR" altLang="en-US" sz="1100" b="1" dirty="0">
+                <a:solidFill>
+                  <a:srgbClr val="FF0000"/>
+                </a:solidFill>
+              </a:rPr>
+              <a:t>생성한 </a:t>
+            </a:r>
+            <a:r>
+              <a:rPr lang="en-US" altLang="ko-KR" sz="1100" b="1" dirty="0">
+                <a:solidFill>
+                  <a:srgbClr val="FF0000"/>
+                </a:solidFill>
+              </a:rPr>
+              <a:t>PRD</a:t>
+            </a:r>
+            <a:r>
+              <a:rPr lang="ko-KR" altLang="en-US" sz="1100" b="1" dirty="0">
+                <a:solidFill>
+                  <a:srgbClr val="FF0000"/>
+                </a:solidFill>
+              </a:rPr>
+              <a:t>를 훑어보며 </a:t>
+            </a:r>
+            <a:r>
+              <a:rPr lang="ko-KR" altLang="en-US" sz="1100" b="1" dirty="0" err="1">
+                <a:solidFill>
+                  <a:srgbClr val="FF0000"/>
+                </a:solidFill>
+              </a:rPr>
+              <a:t>필요없는</a:t>
+            </a:r>
+            <a:r>
+              <a:rPr lang="ko-KR" altLang="en-US" sz="1100" b="1" dirty="0">
+                <a:solidFill>
+                  <a:srgbClr val="FF0000"/>
+                </a:solidFill>
+              </a:rPr>
+              <a:t> 항목 및 잘못된 정보 확인</a:t>
+            </a:r>
+            <a:r>
+              <a:rPr lang="en-US" altLang="ko-KR" sz="1100" b="1" dirty="0">
+                <a:solidFill>
+                  <a:srgbClr val="FF0000"/>
+                </a:solidFill>
+              </a:rPr>
+              <a:t>(</a:t>
+            </a:r>
+            <a:r>
+              <a:rPr lang="ko-KR" altLang="en-US" sz="1100" b="1" dirty="0">
+                <a:solidFill>
+                  <a:srgbClr val="FF0000"/>
+                </a:solidFill>
+              </a:rPr>
+              <a:t>개발자 확인 항목</a:t>
+            </a:r>
+            <a:r>
+              <a:rPr lang="en-US" altLang="ko-KR" sz="1100" b="1" dirty="0">
+                <a:solidFill>
+                  <a:srgbClr val="FF0000"/>
+                </a:solidFill>
+              </a:rPr>
+              <a:t>)</a:t>
+            </a:r>
+            <a:br>
+              <a:rPr lang="en-US" altLang="ko-KR" sz="1100" b="1" dirty="0"/>
+            </a:br>
+            <a:r>
+              <a:rPr lang="en-US" altLang="ko-KR" sz="1100" b="1" dirty="0"/>
+              <a:t>- </a:t>
+            </a:r>
+            <a:r>
+              <a:rPr lang="ko-KR" altLang="en-US" sz="1100" dirty="0"/>
+              <a:t>잘못된 정보의 확인은 기술 관련 공식 문서를 참조 </a:t>
+            </a:r>
+            <a:r>
+              <a:rPr lang="en-US" altLang="ko-KR" sz="1100" dirty="0"/>
+              <a:t>(AI </a:t>
+            </a:r>
+            <a:r>
+              <a:rPr lang="ko-KR" altLang="en-US" sz="1100" dirty="0"/>
+              <a:t>환각 방지</a:t>
+            </a:r>
+            <a:r>
+              <a:rPr lang="en-US" altLang="ko-KR" sz="1100" dirty="0"/>
+              <a:t>)</a:t>
+            </a:r>
+            <a:br>
+              <a:rPr lang="en-US" altLang="ko-KR" sz="1100" dirty="0"/>
+            </a:br>
+            <a:r>
+              <a:rPr lang="en-US" altLang="ko-KR" sz="1100" dirty="0"/>
+              <a:t>(※ AI </a:t>
+            </a:r>
+            <a:r>
+              <a:rPr lang="ko-KR" altLang="en-US" sz="1100" dirty="0"/>
+              <a:t>의 경우 확률적 학습을 기반으로 코드를 작성함으로</a:t>
+            </a:r>
+            <a:r>
+              <a:rPr lang="en-US" altLang="ko-KR" sz="1100" dirty="0"/>
+              <a:t>, </a:t>
+            </a:r>
+            <a:r>
+              <a:rPr lang="ko-KR" altLang="en-US" sz="1100" dirty="0"/>
+              <a:t>기업이 제공하는 기술에 대해</a:t>
+            </a:r>
+            <a:br>
+              <a:rPr lang="en-US" altLang="ko-KR" sz="1100" dirty="0"/>
+            </a:br>
+            <a:r>
+              <a:rPr lang="en-US" altLang="ko-KR" sz="1100" dirty="0"/>
+              <a:t>      </a:t>
+            </a:r>
+            <a:r>
+              <a:rPr lang="ko-KR" altLang="en-US" sz="1100" dirty="0"/>
+              <a:t>추측으로 답하는 경우가 있음</a:t>
+            </a:r>
+            <a:r>
+              <a:rPr lang="en-US" altLang="ko-KR" sz="1100" dirty="0"/>
+              <a:t>.  </a:t>
+            </a:r>
+            <a:r>
+              <a:rPr lang="en-US" altLang="ko-KR" sz="1100" dirty="0">
+                <a:sym typeface="Wingdings" panose="05000000000000000000" pitchFamily="2" charset="2"/>
+              </a:rPr>
+              <a:t> </a:t>
+            </a:r>
+            <a:r>
+              <a:rPr lang="ko-KR" altLang="en-US" sz="1100" dirty="0">
+                <a:sym typeface="Wingdings" panose="05000000000000000000" pitchFamily="2" charset="2"/>
+              </a:rPr>
+              <a:t>지원하지 않는 기술이나 지원하는 걸로 착각하는 경우</a:t>
+            </a:r>
+            <a:r>
+              <a:rPr lang="en-US" altLang="ko-KR" sz="1100" dirty="0">
+                <a:sym typeface="Wingdings" panose="05000000000000000000" pitchFamily="2" charset="2"/>
+              </a:rPr>
+              <a:t>.</a:t>
+            </a:r>
+            <a:r>
+              <a:rPr lang="en-US" altLang="ko-KR" sz="1100" dirty="0"/>
+              <a:t>) </a:t>
+            </a:r>
+          </a:p>
+          <a:p>
+            <a:pPr marL="228600" indent="-228600">
+              <a:buAutoNum type="arabicPeriod"/>
+            </a:pPr>
+            <a:endParaRPr lang="en-US" altLang="ko-KR" sz="1100" b="1" dirty="0"/>
+          </a:p>
+          <a:p>
+            <a:pPr marL="228600" indent="-228600">
+              <a:buAutoNum type="arabicPeriod"/>
+            </a:pPr>
+            <a:r>
+              <a:rPr lang="ko-KR" altLang="en-US" sz="1100" b="1" dirty="0" err="1">
+                <a:solidFill>
+                  <a:srgbClr val="FF0000"/>
+                </a:solidFill>
+              </a:rPr>
+              <a:t>필요없는</a:t>
+            </a:r>
+            <a:r>
+              <a:rPr lang="ko-KR" altLang="en-US" sz="1100" b="1" dirty="0">
+                <a:solidFill>
+                  <a:srgbClr val="FF0000"/>
+                </a:solidFill>
+              </a:rPr>
+              <a:t> 항목과 잘못된 정보를 참고하게 하고</a:t>
+            </a:r>
+            <a:r>
+              <a:rPr lang="en-US" altLang="ko-KR" sz="1100" b="1" dirty="0">
+                <a:solidFill>
+                  <a:srgbClr val="FF0000"/>
+                </a:solidFill>
+              </a:rPr>
+              <a:t>, </a:t>
+            </a:r>
+            <a:r>
+              <a:rPr lang="ko-KR" altLang="en-US" sz="1100" b="1" dirty="0">
+                <a:solidFill>
+                  <a:srgbClr val="FF0000"/>
+                </a:solidFill>
+              </a:rPr>
+              <a:t>해당 오류를 범하지 않도록 </a:t>
+            </a:r>
+            <a:br>
+              <a:rPr lang="en-US" altLang="ko-KR" sz="1100" b="1" dirty="0">
+                <a:solidFill>
+                  <a:srgbClr val="FF0000"/>
+                </a:solidFill>
+              </a:rPr>
+            </a:br>
+            <a:r>
+              <a:rPr lang="ko-KR" altLang="en-US" sz="1100" b="1" dirty="0">
+                <a:solidFill>
+                  <a:srgbClr val="FF0000"/>
+                </a:solidFill>
+              </a:rPr>
+              <a:t>규약을 추가하여 서브 에이전트의 성능을 향상</a:t>
+            </a:r>
+            <a:r>
+              <a:rPr lang="en-US" altLang="ko-KR" sz="1100" b="1" dirty="0">
+                <a:solidFill>
+                  <a:srgbClr val="FF0000"/>
+                </a:solidFill>
+              </a:rPr>
+              <a:t>.</a:t>
+            </a:r>
+          </a:p>
+          <a:p>
+            <a:pPr marL="228600" indent="-228600">
+              <a:buAutoNum type="arabicPeriod"/>
+            </a:pPr>
+            <a:endParaRPr lang="en-US" altLang="ko-KR" sz="1100" b="1" dirty="0"/>
+          </a:p>
+          <a:p>
+            <a:pPr marL="228600" indent="-228600">
+              <a:buAutoNum type="arabicPeriod"/>
+            </a:pPr>
+            <a:r>
+              <a:rPr lang="ko-KR" altLang="en-US" sz="1100" b="1" dirty="0">
+                <a:solidFill>
+                  <a:srgbClr val="FF0000"/>
+                </a:solidFill>
+              </a:rPr>
+              <a:t>검증을 하는 서브 에이전트를 생성 </a:t>
+            </a:r>
+            <a:r>
+              <a:rPr lang="en-US" altLang="ko-KR" sz="1100" b="1" dirty="0">
+                <a:solidFill>
+                  <a:srgbClr val="FF0000"/>
+                </a:solidFill>
+              </a:rPr>
+              <a:t>(</a:t>
+            </a:r>
+            <a:r>
+              <a:rPr lang="ko-KR" altLang="en-US" sz="1100" b="1" dirty="0">
+                <a:solidFill>
+                  <a:srgbClr val="FF0000"/>
+                </a:solidFill>
+              </a:rPr>
+              <a:t>크로스 체크</a:t>
+            </a:r>
+            <a:r>
+              <a:rPr lang="en-US" altLang="ko-KR" sz="1100" b="1" dirty="0">
+                <a:solidFill>
+                  <a:srgbClr val="FF0000"/>
+                </a:solidFill>
+              </a:rPr>
+              <a:t>)</a:t>
+            </a:r>
+            <a:br>
+              <a:rPr lang="en-US" altLang="ko-KR" sz="1100" b="1" dirty="0"/>
+            </a:br>
+            <a:r>
+              <a:rPr lang="en-US" altLang="ko-KR" sz="1100" dirty="0"/>
+              <a:t>- </a:t>
+            </a:r>
+            <a:r>
+              <a:rPr lang="ko-KR" altLang="en-US" sz="1100" dirty="0"/>
+              <a:t>생성 에이전트와 다른 검증 전문 에이전트를 두어 생성된 문서에 대한 검증 수행</a:t>
+            </a:r>
+            <a:br>
+              <a:rPr lang="en-US" altLang="ko-KR" sz="1100" dirty="0"/>
+            </a:br>
+            <a:r>
+              <a:rPr lang="en-US" altLang="ko-KR" sz="1100" dirty="0"/>
+              <a:t>- </a:t>
+            </a:r>
+            <a:r>
+              <a:rPr lang="ko-KR" altLang="en-US" sz="1100" dirty="0"/>
+              <a:t>본인 검증 뿐 아니라 검증 전문 서브 에이전트를 두어 생성 에이전트의 성능 향상에 기여한다</a:t>
+            </a:r>
+            <a:r>
+              <a:rPr lang="en-US" altLang="ko-KR" sz="1100" dirty="0"/>
+              <a:t>. – </a:t>
+            </a:r>
+            <a:r>
+              <a:rPr lang="ko-KR" altLang="en-US" sz="1100" dirty="0"/>
+              <a:t>문제점 검증 및 피드백</a:t>
+            </a:r>
+            <a:br>
+              <a:rPr lang="en-US" altLang="ko-KR" sz="1100" dirty="0"/>
+            </a:br>
+            <a:r>
+              <a:rPr lang="en-US" altLang="ko-KR" sz="1100" dirty="0"/>
+              <a:t>- </a:t>
+            </a:r>
+            <a:r>
+              <a:rPr lang="ko-KR" altLang="en-US" sz="1100" dirty="0"/>
+              <a:t>검증 에이전트도 검증 관련하여 잘못된 부분이 있는지 본인이 절차 등을 살펴보고 성능을 개선해 나간다</a:t>
+            </a:r>
+            <a:r>
+              <a:rPr lang="en-US" altLang="ko-KR" sz="1100" dirty="0"/>
+              <a:t>.</a:t>
+            </a:r>
+          </a:p>
+          <a:p>
+            <a:endParaRPr lang="en-US" altLang="ko-KR" sz="1100" b="1" dirty="0">
+              <a:solidFill>
+                <a:srgbClr val="FF0000"/>
+              </a:solidFill>
+            </a:endParaRPr>
+          </a:p>
+          <a:p>
+            <a:r>
+              <a:rPr lang="en-US" altLang="ko-KR" sz="1100" b="1" dirty="0">
+                <a:solidFill>
+                  <a:srgbClr val="FF0000"/>
+                </a:solidFill>
+              </a:rPr>
+              <a:t>※ </a:t>
+            </a:r>
+            <a:r>
+              <a:rPr lang="ko-KR" altLang="en-US" sz="1100" b="1" dirty="0">
+                <a:solidFill>
+                  <a:srgbClr val="FF0000"/>
+                </a:solidFill>
+              </a:rPr>
+              <a:t>특정 템플릿의 형태로 결과를 기대하는 경우</a:t>
+            </a:r>
+            <a:r>
+              <a:rPr lang="en-US" altLang="ko-KR" sz="1100" b="1" dirty="0">
+                <a:solidFill>
+                  <a:srgbClr val="FF0000"/>
+                </a:solidFill>
+              </a:rPr>
+              <a:t>.</a:t>
+            </a:r>
+          </a:p>
+          <a:p>
+            <a:pPr marL="171450" indent="-171450">
+              <a:buFont typeface="Wingdings" panose="05000000000000000000" pitchFamily="2" charset="2"/>
+              <a:buChar char="à"/>
+            </a:pPr>
+            <a:r>
+              <a:rPr lang="ko-KR" altLang="en-US" sz="1100" dirty="0">
+                <a:sym typeface="Wingdings" panose="05000000000000000000" pitchFamily="2" charset="2"/>
+              </a:rPr>
+              <a:t>서브 에이전트에 출력물에 대한 예상 결과를 작성하여 알려줌</a:t>
+            </a:r>
+            <a:r>
+              <a:rPr lang="en-US" altLang="ko-KR" sz="1100" dirty="0">
+                <a:sym typeface="Wingdings" panose="05000000000000000000" pitchFamily="2" charset="2"/>
+              </a:rPr>
+              <a:t>.</a:t>
+            </a:r>
+          </a:p>
+          <a:p>
+            <a:br>
+              <a:rPr lang="en-US" altLang="ko-KR" sz="1100" dirty="0"/>
+            </a:br>
+            <a:br>
+              <a:rPr lang="en-US" altLang="ko-KR" sz="1100" dirty="0"/>
+            </a:br>
+            <a:endParaRPr lang="ko-KR" altLang="en-US" sz="1100" dirty="0"/>
+          </a:p>
+          <a:p>
+            <a:endParaRPr lang="ko-KR" altLang="en-US" sz="1200" dirty="0"/>
+          </a:p>
+        </p:txBody>
+      </p:sp>
+      <p:pic>
+        <p:nvPicPr>
+          <p:cNvPr id="5" name="그림 4">
+            <a:extLst>
+              <a:ext uri="{FF2B5EF4-FFF2-40B4-BE49-F238E27FC236}">
+                <a16:creationId xmlns:a16="http://schemas.microsoft.com/office/drawing/2014/main" id="{078DFF32-6544-1A69-053F-989C53A74315}"/>
+              </a:ext>
+            </a:extLst>
+          </p:cNvPr>
+          <p:cNvPicPr>
+            <a:picLocks noChangeAspect="1"/>
+          </p:cNvPicPr>
+          <p:nvPr/>
+        </p:nvPicPr>
+        <p:blipFill>
+          <a:blip r:embed="rId2"/>
+          <a:stretch>
+            <a:fillRect/>
+          </a:stretch>
+        </p:blipFill>
+        <p:spPr>
+          <a:xfrm>
+            <a:off x="5597447" y="5001582"/>
+            <a:ext cx="4404392" cy="1718652"/>
+          </a:xfrm>
+          <a:prstGeom prst="rect">
+            <a:avLst/>
+          </a:prstGeom>
+        </p:spPr>
+      </p:pic>
+    </p:spTree>
+    <p:extLst>
+      <p:ext uri="{BB962C8B-B14F-4D97-AF65-F5344CB8AC3E}">
+        <p14:creationId xmlns:p14="http://schemas.microsoft.com/office/powerpoint/2010/main" val="1009059003"/>
       </p:ext>
     </p:extLst>
   </p:cSld>
